--- a/deliverables/MiniDiDi_slides.pptx
+++ b/deliverables/MiniDiDi_slides.pptx
@@ -113,12 +113,12 @@
   <p:extLst>
     <p:ext uri="{521415D9-36F7-43E2-AB2F-B90AF26B5E84}">
       <p14:sectionLst xmlns:p14="http://schemas.microsoft.com/office/powerpoint/2010/main">
-        <p14:section name="封面" id="{84dcf46f-f96d-0b90-7bad-b5c1e8548534}">
+        <p14:section name="封面" id="{67f85183-aeb0-ed6c-b775-77bfa6a089bf}">
           <p14:sldIdLst>
             <p14:sldId id="256"/>
           </p14:sldIdLst>
         </p14:section>
-        <p14:section name="正文" id="{8abe2e13-8b0d-f879-063a-8f05a5c85d62}">
+        <p14:section name="正文" id="{e0081a79-6434-edbd-4c91-6a4b98adec3c}">
           <p14:sldIdLst>
             <p14:sldId id="257"/>
             <p14:sldId id="258"/>
@@ -127,7 +127,7 @@
             <p14:sldId id="261"/>
           </p14:sldIdLst>
         </p14:section>
-        <p14:section name="结尾" id="{cf4f30ae-31c2-f752-8868-966b55375843}">
+        <p14:section name="结尾" id="{d3181998-861f-e38e-1b80-53183fb83c21}">
           <p14:sldIdLst>
             <p14:sldId id="262"/>
           </p14:sldIdLst>
@@ -2259,7 +2259,7 @@
                   <a:schemeClr val="bg2"/>
                 </a:solidFill>
               </a:rPr>
-              <a:t>第 ___ 组　组长 ______</a:t>
+              <a:t>第 ___ 组　组长 阮飞翔 2252753</a:t>
             </a:r>
             <a:endParaRPr lang="en-US" sz="1200" dirty="0"/>
           </a:p>
@@ -2273,7 +2273,7 @@
                   <a:schemeClr val="bg2"/>
                 </a:solidFill>
               </a:rPr>
-              <a:t>组员 ______　______　______　______</a:t>
+              <a:t>组员 樊宇泽 2351586　李昊博 2352853　付泽亮 2353413</a:t>
             </a:r>
             <a:endParaRPr lang="en-US" sz="1200" dirty="0"/>
           </a:p>
@@ -7553,7 +7553,21 @@
                   <a:schemeClr val="bg2"/>
                 </a:solidFill>
               </a:rPr>
-              <a:t>源码、技术报告、测试与评估数据：gitee 私有库 ______</a:t>
+              <a:t>源码、技术报告、测试与评估数据：</a:t>
+            </a:r>
+            <a:endParaRPr lang="en-US" sz="1200" dirty="0"/>
+          </a:p>
+          <a:p>
+            <a:pPr indent="0" marL="0">
+              <a:buNone/>
+            </a:pPr>
+            <a:r>
+              <a:rPr lang="en-US" sz="1200" dirty="0">
+                <a:solidFill>
+                  <a:schemeClr val="bg2"/>
+                </a:solidFill>
+              </a:rPr>
+              <a:t>github.com/fuzeliang1/ZongC</a:t>
             </a:r>
             <a:endParaRPr lang="en-US" sz="1200" dirty="0"/>
           </a:p>

--- a/deliverables/MiniDiDi_slides.pptx
+++ b/deliverables/MiniDiDi_slides.pptx
@@ -113,12 +113,12 @@
   <p:extLst>
     <p:ext uri="{521415D9-36F7-43E2-AB2F-B90AF26B5E84}">
       <p14:sectionLst xmlns:p14="http://schemas.microsoft.com/office/powerpoint/2010/main">
-        <p14:section name="封面" id="{67f85183-aeb0-ed6c-b775-77bfa6a089bf}">
+        <p14:section name="封面" id="{5821f6f4-0c9b-969b-6ae0-9acc87f953f0}">
           <p14:sldIdLst>
             <p14:sldId id="256"/>
           </p14:sldIdLst>
         </p14:section>
-        <p14:section name="正文" id="{e0081a79-6434-edbd-4c91-6a4b98adec3c}">
+        <p14:section name="正文" id="{5a6c1820-2497-e2e4-9d5d-5b48260e3efc}">
           <p14:sldIdLst>
             <p14:sldId id="257"/>
             <p14:sldId id="258"/>
@@ -127,7 +127,7 @@
             <p14:sldId id="261"/>
           </p14:sldIdLst>
         </p14:section>
-        <p14:section name="结尾" id="{d3181998-861f-e38e-1b80-53183fb83c21}">
+        <p14:section name="结尾" id="{fea7fb9d-475c-78fe-8e63-a0784a9fcb8f}">
           <p14:sldIdLst>
             <p14:sldId id="262"/>
           </p14:sldIdLst>
@@ -2259,7 +2259,21 @@
                   <a:schemeClr val="bg2"/>
                 </a:solidFill>
               </a:rPr>
-              <a:t>第 ___ 组　组长 阮飞翔 2252753</a:t>
+              <a:t>第 1 组　指导教师 许春权</a:t>
+            </a:r>
+            <a:endParaRPr lang="en-US" sz="1200" dirty="0"/>
+          </a:p>
+          <a:p>
+            <a:pPr indent="0" marL="0">
+              <a:buNone/>
+            </a:pPr>
+            <a:r>
+              <a:rPr lang="en-US" sz="1200" dirty="0">
+                <a:solidFill>
+                  <a:schemeClr val="bg2"/>
+                </a:solidFill>
+              </a:rPr>
+              <a:t>组长 阮飞翔 2252753</a:t>
             </a:r>
             <a:endParaRPr lang="en-US" sz="1200" dirty="0"/>
           </a:p>

--- a/deliverables/MiniDiDi_slides.pptx
+++ b/deliverables/MiniDiDi_slides.pptx
@@ -113,12 +113,12 @@
   <p:extLst>
     <p:ext uri="{521415D9-36F7-43E2-AB2F-B90AF26B5E84}">
       <p14:sectionLst xmlns:p14="http://schemas.microsoft.com/office/powerpoint/2010/main">
-        <p14:section name="封面" id="{5821f6f4-0c9b-969b-6ae0-9acc87f953f0}">
+        <p14:section name="封面" id="{bf3c48b3-62e2-aa08-97dc-2021d65435c7}">
           <p14:sldIdLst>
             <p14:sldId id="256"/>
           </p14:sldIdLst>
         </p14:section>
-        <p14:section name="正文" id="{5a6c1820-2497-e2e4-9d5d-5b48260e3efc}">
+        <p14:section name="正文" id="{65aa5787-dc42-ac0e-c8c2-6e673e2669b1}">
           <p14:sldIdLst>
             <p14:sldId id="257"/>
             <p14:sldId id="258"/>
@@ -127,7 +127,7 @@
             <p14:sldId id="261"/>
           </p14:sldIdLst>
         </p14:section>
-        <p14:section name="结尾" id="{fea7fb9d-475c-78fe-8e63-a0784a9fcb8f}">
+        <p14:section name="结尾" id="{d836eace-fcfe-e30b-0c08-994634aad854}">
           <p14:sldIdLst>
             <p14:sldId id="262"/>
           </p14:sldIdLst>
@@ -1349,7 +1349,7 @@
           <a:p>
             <a:r>
               <a:rPr lang="en-US" dirty="0"/>
-              <a:t>挑战项我们做了六个：自写 WebGL 的 3D 视图、感知与辅助建图、端云互动、图像处理加速、Gazebo 物理仿真小车、需求预测空车调度。评估方面：16 辆车、每分钟 16 单的高负载，运行带路障和未知障碍的演示场景 6 次、每次 60 分钟，碰撞全部为零；103 项单元测试全部通过；系统集成测试中断开整个车队，0.2 秒内全部由数字世界接管。最后，考核过程中不需要任何人工操作，所有情节都由场景脚本按时间自动触发。</a:t>
+              <a:t>挑战项我们做了六个：自写 WebGL 的 3D 视图、感知与辅助建图、端云互动、图像处理加速、Gazebo 物理仿真小车、需求预测空车调度。评估方面：16 辆车、每分钟 16 单的高负载，运行带路障和未知障碍的演示场景 6 次、每次 60 分钟，碰撞全部为零；104 项单元测试全部通过；系统集成测试中断开整个车队，0.2 秒内全部由数字世界接管。最后，考核过程中不需要任何人工操作，所有情节都由场景脚本按时间自动触发。</a:t>
             </a:r>
             <a:endParaRPr lang="en-US" dirty="0"/>
           </a:p>

--- a/deliverables/MiniDiDi_slides.pptx
+++ b/deliverables/MiniDiDi_slides.pptx
@@ -117,12 +117,12 @@
   <p:extLst>
     <p:ext uri="{521415D9-36F7-43E2-AB2F-B90AF26B5E84}">
       <p14:sectionLst xmlns:p14="http://schemas.microsoft.com/office/powerpoint/2010/main">
-        <p14:section name="封面" id="{94f25115-0ff7-2371-ccf2-afe5edc5c03e}">
+        <p14:section name="封面" id="{8944b3ff-2d5d-349e-a6c7-1953d2753981}">
           <p14:sldIdLst>
             <p14:sldId id="256"/>
           </p14:sldIdLst>
         </p14:section>
-        <p14:section name="正文" id="{078e5db2-d2ba-3de7-423f-70e765880b51}">
+        <p14:section name="正文" id="{4e28de13-93df-5950-b870-2951489cf06a}">
           <p14:sldIdLst>
             <p14:sldId id="257"/>
             <p14:sldId id="258"/>
@@ -131,12 +131,12 @@
             <p14:sldId id="261"/>
           </p14:sldIdLst>
         </p14:section>
-        <p14:section name="结尾" id="{52bb2929-68aa-40b1-96bc-fd5014d7f683}">
+        <p14:section name="结尾" id="{5837308e-837a-ce09-926d-60ba2980374c}">
           <p14:sldIdLst>
             <p14:sldId id="262"/>
           </p14:sldIdLst>
         </p14:section>
-        <p14:section name="附录" id="{1dbf0b07-cc4a-edec-af11-45fd760ef976}">
+        <p14:section name="附录" id="{e4e7c736-ebc5-dba2-09ab-b1b5d36c9fe6}">
           <p14:sldIdLst>
             <p14:sldId id="263"/>
             <p14:sldId id="264"/>
@@ -1714,7 +1714,7 @@
           <a:p>
             <a:r>
               <a:rPr lang="en-US" dirty="0"/>
-              <a:t>备用页：课程要求逐项对照。必做里只有手机 App 还差真机实测，代码和仿真验证都已完成。</a:t>
+              <a:t>备用页：课程要求逐项对照。手机 App 已在 vivo S20 真机上实测：走路驾驶、拍照识别正常，车从未越过授权停车点。</a:t>
             </a:r>
             <a:endParaRPr lang="en-US" dirty="0"/>
           </a:p>
@@ -13716,7 +13716,7 @@
                   <a:schemeClr val="tx2"/>
                 </a:solidFill>
               </a:rPr>
-              <a:t>必做 7 项、挑战 5 项：除手机 App 待真机实测外，全部完成并经测试验证</a:t>
+              <a:t>必做 7 项、挑战 5 项全部完成并经测试验证，手机 App 已在安卓真机上实测</a:t>
             </a:r>
             <a:endParaRPr lang="en-US" sz="1600" dirty="0"/>
           </a:p>
@@ -15048,10 +15048,10 @@
                       <a:r>
                         <a:rPr lang="en-US" sz="1300" b="1" dirty="0">
                           <a:solidFill>
-                            <a:schemeClr val="accent1"/>
+                            <a:schemeClr val="accent2"/>
                           </a:solidFill>
                         </a:rPr>
-                        <a:t>基本完成</a:t>
+                        <a:t>已完成</a:t>
                       </a:r>
                       <a:pPr indent="0" marL="0">
                         <a:buNone/>
@@ -15062,7 +15062,7 @@
                             <a:schemeClr val="tx1"/>
                           </a:solidFill>
                         </a:rPr>
-                        <a:t>：核心算法仿真验证通过，APK 已编译，待真机实测</a:t>
+                        <a:t>：真机（vivo S20）走路驾驶，延迟约 34 ms，不越权</a:t>
                       </a:r>
                       <a:endParaRPr lang="en-US" sz="1300" dirty="0"/>
                     </a:p>

--- a/deliverables/MiniDiDi_slides.pptx
+++ b/deliverables/MiniDiDi_slides.pptx
@@ -117,12 +117,12 @@
   <p:extLst>
     <p:ext uri="{521415D9-36F7-43E2-AB2F-B90AF26B5E84}">
       <p14:sectionLst xmlns:p14="http://schemas.microsoft.com/office/powerpoint/2010/main">
-        <p14:section name="封面" id="{8944b3ff-2d5d-349e-a6c7-1953d2753981}">
+        <p14:section name="封面" id="{5eeff13d-0fde-b63f-f91f-de2262843e03}">
           <p14:sldIdLst>
             <p14:sldId id="256"/>
           </p14:sldIdLst>
         </p14:section>
-        <p14:section name="正文" id="{4e28de13-93df-5950-b870-2951489cf06a}">
+        <p14:section name="正文" id="{526c22b5-97cc-03db-631f-cfb5d1db3829}">
           <p14:sldIdLst>
             <p14:sldId id="257"/>
             <p14:sldId id="258"/>
@@ -131,12 +131,12 @@
             <p14:sldId id="261"/>
           </p14:sldIdLst>
         </p14:section>
-        <p14:section name="结尾" id="{5837308e-837a-ce09-926d-60ba2980374c}">
+        <p14:section name="结尾" id="{d27b74ab-5532-3724-4dfd-b9509768952d}">
           <p14:sldIdLst>
             <p14:sldId id="262"/>
           </p14:sldIdLst>
         </p14:section>
-        <p14:section name="附录" id="{e4e7c736-ebc5-dba2-09ab-b1b5d36c9fe6}">
+        <p14:section name="附录" id="{9d79c0b7-3106-d47e-096b-b4c65e7ffaa7}">
           <p14:sldIdLst>
             <p14:sldId id="263"/>
             <p14:sldId id="264"/>
@@ -1714,7 +1714,7 @@
           <a:p>
             <a:r>
               <a:rPr lang="en-US" dirty="0"/>
-              <a:t>备用页：课程要求逐项对照。手机 App 已在 vivo S20 真机上实测：走路驾驶、拍照识别正常，车从未越过授权停车点。</a:t>
+              <a:t>备用页：课程要求逐项对照。手机 App 已在 vivo S20 真机上实测：走路驾驶、拍照识别正常，车从未越过授权停车点。Matlab 车队在 Windows 上的 MATLAB R2024b 中带图窗运行约 16 分钟，零碰撞、零越权。</a:t>
             </a:r>
             <a:endParaRPr lang="en-US" dirty="0"/>
           </a:p>
@@ -13716,7 +13716,7 @@
                   <a:schemeClr val="tx2"/>
                 </a:solidFill>
               </a:rPr>
-              <a:t>必做 7 项、挑战 5 项全部完成并经测试验证，手机 App 已在安卓真机上实测</a:t>
+              <a:t>必做 7 项、挑战 5 项全部完成并经测试验证，手机 App 和 Matlab 车队已实机运行</a:t>
             </a:r>
             <a:endParaRPr lang="en-US" sz="1600" dirty="0"/>
           </a:p>
@@ -14866,7 +14866,7 @@
                             <a:schemeClr val="tx1"/>
                           </a:solidFill>
                         </a:rPr>
-                        <a:t>：CI 中 MATLAB R2024b 运行，5 车零碰撞、零越权</a:t>
+                        <a:t>：CI 与本机 MATLAB R2024b 实测，5 车零碰撞、零越权</a:t>
                       </a:r>
                       <a:endParaRPr lang="en-US" sz="1300" dirty="0"/>
                     </a:p>
